--- a/workspaces/cie-cpp-level3/lesson-09/courseware.pptx
+++ b/workspaces/cie-cpp-level3/lesson-09/courseware.pptx
@@ -5456,7 +5456,7 @@
                 <a:ea typeface="Hiragino Sans GB" pitchFamily="34" charset="-122"/>
                 <a:cs typeface="Hiragino Sans GB" pitchFamily="34" charset="-120"/>
               </a:rPr>
-              <a:t>字符图形中角、边、内部的合理判断顺序是？</a:t>
+              <a:t>字符图形中角、边、中间区域的合理判断顺序是？</a:t>
             </a:r>
             <a:endParaRPr lang="en-US" sz="2200" dirty="0"/>
           </a:p>
